--- a/資料庫_說明文件/d.常用(必備)SQL語法_2-使用MSSQL_SERVER.pptx
+++ b/資料庫_說明文件/d.常用(必備)SQL語法_2-使用MSSQL_SERVER.pptx
@@ -260,7 +260,7 @@
           <a:p>
             <a:fld id="{856DA525-4C1A-4B8B-B33C-F8B0B54AD9F2}" type="datetimeFigureOut">
               <a:rPr lang="zh-TW" altLang="en-US" smtClean="0"/>
-              <a:t>2026/4/12</a:t>
+              <a:t>2026/4/13</a:t>
             </a:fld>
             <a:endParaRPr lang="zh-TW" altLang="en-US"/>
           </a:p>
@@ -430,7 +430,7 @@
           <a:p>
             <a:fld id="{856DA525-4C1A-4B8B-B33C-F8B0B54AD9F2}" type="datetimeFigureOut">
               <a:rPr lang="zh-TW" altLang="en-US" smtClean="0"/>
-              <a:t>2026/4/12</a:t>
+              <a:t>2026/4/13</a:t>
             </a:fld>
             <a:endParaRPr lang="zh-TW" altLang="en-US"/>
           </a:p>
@@ -610,7 +610,7 @@
           <a:p>
             <a:fld id="{856DA525-4C1A-4B8B-B33C-F8B0B54AD9F2}" type="datetimeFigureOut">
               <a:rPr lang="zh-TW" altLang="en-US" smtClean="0"/>
-              <a:t>2026/4/12</a:t>
+              <a:t>2026/4/13</a:t>
             </a:fld>
             <a:endParaRPr lang="zh-TW" altLang="en-US"/>
           </a:p>
@@ -780,7 +780,7 @@
           <a:p>
             <a:fld id="{856DA525-4C1A-4B8B-B33C-F8B0B54AD9F2}" type="datetimeFigureOut">
               <a:rPr lang="zh-TW" altLang="en-US" smtClean="0"/>
-              <a:t>2026/4/12</a:t>
+              <a:t>2026/4/13</a:t>
             </a:fld>
             <a:endParaRPr lang="zh-TW" altLang="en-US"/>
           </a:p>
@@ -1026,7 +1026,7 @@
           <a:p>
             <a:fld id="{856DA525-4C1A-4B8B-B33C-F8B0B54AD9F2}" type="datetimeFigureOut">
               <a:rPr lang="zh-TW" altLang="en-US" smtClean="0"/>
-              <a:t>2026/4/12</a:t>
+              <a:t>2026/4/13</a:t>
             </a:fld>
             <a:endParaRPr lang="zh-TW" altLang="en-US"/>
           </a:p>
@@ -1258,7 +1258,7 @@
           <a:p>
             <a:fld id="{856DA525-4C1A-4B8B-B33C-F8B0B54AD9F2}" type="datetimeFigureOut">
               <a:rPr lang="zh-TW" altLang="en-US" smtClean="0"/>
-              <a:t>2026/4/12</a:t>
+              <a:t>2026/4/13</a:t>
             </a:fld>
             <a:endParaRPr lang="zh-TW" altLang="en-US"/>
           </a:p>
@@ -1625,7 +1625,7 @@
           <a:p>
             <a:fld id="{856DA525-4C1A-4B8B-B33C-F8B0B54AD9F2}" type="datetimeFigureOut">
               <a:rPr lang="zh-TW" altLang="en-US" smtClean="0"/>
-              <a:t>2026/4/12</a:t>
+              <a:t>2026/4/13</a:t>
             </a:fld>
             <a:endParaRPr lang="zh-TW" altLang="en-US"/>
           </a:p>
@@ -1743,7 +1743,7 @@
           <a:p>
             <a:fld id="{856DA525-4C1A-4B8B-B33C-F8B0B54AD9F2}" type="datetimeFigureOut">
               <a:rPr lang="zh-TW" altLang="en-US" smtClean="0"/>
-              <a:t>2026/4/12</a:t>
+              <a:t>2026/4/13</a:t>
             </a:fld>
             <a:endParaRPr lang="zh-TW" altLang="en-US"/>
           </a:p>
@@ -1838,7 +1838,7 @@
           <a:p>
             <a:fld id="{856DA525-4C1A-4B8B-B33C-F8B0B54AD9F2}" type="datetimeFigureOut">
               <a:rPr lang="zh-TW" altLang="en-US" smtClean="0"/>
-              <a:t>2026/4/12</a:t>
+              <a:t>2026/4/13</a:t>
             </a:fld>
             <a:endParaRPr lang="zh-TW" altLang="en-US"/>
           </a:p>
@@ -2115,7 +2115,7 @@
           <a:p>
             <a:fld id="{856DA525-4C1A-4B8B-B33C-F8B0B54AD9F2}" type="datetimeFigureOut">
               <a:rPr lang="zh-TW" altLang="en-US" smtClean="0"/>
-              <a:t>2026/4/12</a:t>
+              <a:t>2026/4/13</a:t>
             </a:fld>
             <a:endParaRPr lang="zh-TW" altLang="en-US"/>
           </a:p>
@@ -2368,7 +2368,7 @@
           <a:p>
             <a:fld id="{856DA525-4C1A-4B8B-B33C-F8B0B54AD9F2}" type="datetimeFigureOut">
               <a:rPr lang="zh-TW" altLang="en-US" smtClean="0"/>
-              <a:t>2026/4/12</a:t>
+              <a:t>2026/4/13</a:t>
             </a:fld>
             <a:endParaRPr lang="zh-TW" altLang="en-US"/>
           </a:p>
@@ -2581,7 +2581,7 @@
           <a:p>
             <a:fld id="{856DA525-4C1A-4B8B-B33C-F8B0B54AD9F2}" type="datetimeFigureOut">
               <a:rPr lang="zh-TW" altLang="en-US" smtClean="0"/>
-              <a:t>2026/4/12</a:t>
+              <a:t>2026/4/13</a:t>
             </a:fld>
             <a:endParaRPr lang="zh-TW" altLang="en-US"/>
           </a:p>
@@ -4038,11 +4038,7 @@
                       </a:r>
                       <a:r>
                         <a:rPr lang="zh-TW" altLang="en-US" dirty="0" smtClean="0"/>
-                        <a:t>出</a:t>
-                      </a:r>
-                      <a:r>
-                        <a:rPr lang="zh-TW" altLang="en-US" dirty="0" smtClean="0"/>
-                        <a:t>資料</a:t>
+                        <a:t>出資料</a:t>
                       </a:r>
                       <a:r>
                         <a:rPr lang="en-US" altLang="zh-TW" dirty="0" smtClean="0"/>
@@ -4058,11 +4054,7 @@
                       </a:r>
                       <a:r>
                         <a:rPr lang="zh-TW" altLang="en-US" dirty="0" smtClean="0"/>
-                        <a:t>插入另一</a:t>
-                      </a:r>
-                      <a:r>
-                        <a:rPr lang="zh-TW" altLang="en-US" dirty="0" smtClean="0"/>
-                        <a:t>表格</a:t>
+                        <a:t>插入另一表格</a:t>
                       </a:r>
                       <a:r>
                         <a:rPr lang="en-US" altLang="zh-TW" dirty="0" smtClean="0"/>
@@ -4358,13 +4350,6 @@
                         </a:rPr>
                         <a:t>結構本來就已經存在</a:t>
                       </a:r>
-                      <a:endParaRPr lang="zh-TW" altLang="en-US" dirty="0" smtClean="0">
-                        <a:solidFill>
-                          <a:srgbClr val="0000FF"/>
-                        </a:solidFill>
-                        <a:latin typeface="標楷體" panose="03000509000000000000" pitchFamily="65" charset="-120"/>
-                        <a:ea typeface="標楷體" panose="03000509000000000000" pitchFamily="65" charset="-120"/>
-                      </a:endParaRPr>
                     </a:p>
                   </a:txBody>
                   <a:tcPr/>
@@ -13356,13 +13341,6 @@
                         </a:rPr>
                         <a:t>]</a:t>
                       </a:r>
-                      <a:endParaRPr lang="en-US" altLang="zh-TW" dirty="0" smtClean="0">
-                        <a:solidFill>
-                          <a:schemeClr val="tx1"/>
-                        </a:solidFill>
-                        <a:latin typeface="標楷體" panose="03000509000000000000" pitchFamily="65" charset="-120"/>
-                        <a:ea typeface="標楷體" panose="03000509000000000000" pitchFamily="65" charset="-120"/>
-                      </a:endParaRPr>
                     </a:p>
                   </a:txBody>
                   <a:tcPr/>
@@ -13881,13 +13859,6 @@
                         </a:rPr>
                         <a:t>?</a:t>
                       </a:r>
-                      <a:endParaRPr lang="en-US" altLang="zh-TW" dirty="0" smtClean="0">
-                        <a:solidFill>
-                          <a:schemeClr val="tx1"/>
-                        </a:solidFill>
-                        <a:latin typeface="標楷體" panose="03000509000000000000" pitchFamily="65" charset="-120"/>
-                        <a:ea typeface="標楷體" panose="03000509000000000000" pitchFamily="65" charset="-120"/>
-                      </a:endParaRPr>
                     </a:p>
                   </a:txBody>
                   <a:tcPr/>
@@ -14829,14 +14800,7 @@
                 <a:latin typeface="標楷體" panose="03000509000000000000" pitchFamily="65" charset="-120"/>
                 <a:ea typeface="標楷體" panose="03000509000000000000" pitchFamily="65" charset="-120"/>
               </a:rPr>
-              <a:t>. </a:t>
-            </a:r>
-            <a:r>
-              <a:rPr lang="en-US" altLang="zh-TW" dirty="0" smtClean="0">
-                <a:latin typeface="標楷體" panose="03000509000000000000" pitchFamily="65" charset="-120"/>
-                <a:ea typeface="標楷體" panose="03000509000000000000" pitchFamily="65" charset="-120"/>
-              </a:rPr>
-              <a:t>simple </a:t>
+              <a:t>. simple </a:t>
             </a:r>
             <a:r>
               <a:rPr lang="en-US" altLang="zh-TW" dirty="0" smtClean="0">
@@ -21096,13 +21060,6 @@
                         </a:rPr>
                         <a:t>字串必須用單引號括起來</a:t>
                       </a:r>
-                      <a:endParaRPr lang="zh-TW" altLang="en-US" dirty="0" smtClean="0">
-                        <a:solidFill>
-                          <a:srgbClr val="0000FF"/>
-                        </a:solidFill>
-                        <a:latin typeface="標楷體" panose="03000509000000000000" pitchFamily="65" charset="-120"/>
-                        <a:ea typeface="標楷體" panose="03000509000000000000" pitchFamily="65" charset="-120"/>
-                      </a:endParaRPr>
                     </a:p>
                   </a:txBody>
                   <a:tcPr/>
@@ -22132,13 +22089,6 @@
                         </a:rPr>
                         <a:t>Detail</a:t>
                       </a:r>
-                      <a:endParaRPr lang="en-US" altLang="zh-TW" dirty="0" smtClean="0">
-                        <a:solidFill>
-                          <a:srgbClr val="FF0000"/>
-                        </a:solidFill>
-                        <a:latin typeface="標楷體" panose="03000509000000000000" pitchFamily="65" charset="-120"/>
-                        <a:ea typeface="標楷體" panose="03000509000000000000" pitchFamily="65" charset="-120"/>
-                      </a:endParaRPr>
                     </a:p>
                   </a:txBody>
                   <a:tcPr/>
@@ -22755,13 +22705,6 @@
                         </a:rPr>
                         <a:t>非必要</a:t>
                       </a:r>
-                      <a:endParaRPr lang="zh-TW" altLang="en-US" dirty="0" smtClean="0">
-                        <a:solidFill>
-                          <a:srgbClr val="0000FF"/>
-                        </a:solidFill>
-                        <a:latin typeface="標楷體" panose="03000509000000000000" pitchFamily="65" charset="-120"/>
-                        <a:ea typeface="標楷體" panose="03000509000000000000" pitchFamily="65" charset="-120"/>
-                      </a:endParaRPr>
                     </a:p>
                   </a:txBody>
                   <a:tcPr/>
@@ -24158,13 +24101,6 @@
                         </a:rPr>
                         <a:t>在資料表中新增一筆資料</a:t>
                       </a:r>
-                      <a:endParaRPr lang="zh-TW" altLang="en-US" dirty="0" smtClean="0">
-                        <a:solidFill>
-                          <a:schemeClr val="tx1"/>
-                        </a:solidFill>
-                        <a:latin typeface="標楷體" panose="03000509000000000000" pitchFamily="65" charset="-120"/>
-                        <a:ea typeface="標楷體" panose="03000509000000000000" pitchFamily="65" charset="-120"/>
-                      </a:endParaRPr>
                     </a:p>
                   </a:txBody>
                   <a:tcPr/>
@@ -24772,13 +24708,6 @@
                         </a:rPr>
                         <a:t>字串必須用單引號括起來</a:t>
                       </a:r>
-                      <a:endParaRPr lang="zh-TW" altLang="en-US" dirty="0" smtClean="0">
-                        <a:solidFill>
-                          <a:srgbClr val="0000FF"/>
-                        </a:solidFill>
-                        <a:latin typeface="標楷體" panose="03000509000000000000" pitchFamily="65" charset="-120"/>
-                        <a:ea typeface="標楷體" panose="03000509000000000000" pitchFamily="65" charset="-120"/>
-                      </a:endParaRPr>
                     </a:p>
                   </a:txBody>
                   <a:tcPr/>
@@ -25156,15 +25085,7 @@
                       </a:pPr>
                       <a:r>
                         <a:rPr lang="zh-TW" altLang="en-US" dirty="0" smtClean="0"/>
-                        <a:t>（需插入所有欄位）按</a:t>
-                      </a:r>
-                      <a:r>
-                        <a:rPr lang="zh-TW" altLang="en-US" dirty="0" smtClean="0"/>
-                        <a:t>欄位</a:t>
-                      </a:r>
-                      <a:r>
-                        <a:rPr lang="zh-TW" altLang="en-US" dirty="0" smtClean="0"/>
-                        <a:t>順序插入值</a:t>
+                        <a:t>（需插入所有欄位）按欄位順序插入值</a:t>
                       </a:r>
                       <a:endParaRPr lang="zh-TW" altLang="en-US" dirty="0" smtClean="0">
                         <a:solidFill>
